--- a/A1《白穹纪元：机械永生录》/14-商业材料/白穹纪元路演PPT.pptx
+++ b/A1《白穹纪元：机械永生录》/14-商业材料/白穹纪元路演PPT.pptx
@@ -4,9 +4,6 @@
   <p:sldMasterIdLst>
     <p:sldMasterId id="2147483648" r:id="rId1"/>
   </p:sldMasterIdLst>
-  <p:notesMasterIdLst>
-    <p:notesMasterId r:id="rId15"/>
-  </p:notesMasterIdLst>
   <p:sldIdLst>
     <p:sldId id="256" r:id="rId2"/>
     <p:sldId id="257" r:id="rId3"/>
@@ -22,7 +19,10 @@
     <p:sldId id="267" r:id="rId13"/>
     <p:sldId id="268" r:id="rId14"/>
   </p:sldIdLst>
-  <p:sldSz cx="9144000" cy="5143500" type="screen16x9"/>
+  <p:notesMasterIdLst>
+    <p:notesMasterId r:id="rId15"/>
+  </p:notesMasterIdLst>
+  <p:sldSz cx="9144000" cy="5143500"/>
   <p:notesSz cx="5143500" cy="9144000"/>
   <p:defaultTextStyle>
     <a:lvl1pPr marL="0" algn="l" defTabSz="914400" rtl="0" eaLnBrk="1" latinLnBrk="0" hangingPunct="1">
@@ -116,11 +116,6 @@
       </a:defRPr>
     </a:lvl9pPr>
   </p:defaultTextStyle>
-  <p:extLst>
-    <p:ext uri="{EFAFB233-063F-42B5-8137-9DF3F51BA10A}">
-      <p15:sldGuideLst xmlns:p15="http://schemas.microsoft.com/office/powerpoint/2012/main"/>
-    </p:ext>
-  </p:extLst>
 </p:presentation>
 </file>
 
@@ -146,10 +141,234 @@
           <a:chExt cx="0" cy="0"/>
         </a:xfrm>
       </p:grpSpPr>
+      <p:sp>
+        <p:nvSpPr>
+          <p:cNvPr id="2" name="Header Placeholder 1"/>
+          <p:cNvSpPr>
+            <a:spLocks noGrp="1"/>
+          </p:cNvSpPr>
+          <p:nvPr>
+            <p:ph type="hdr" sz="quarter"/>
+          </p:nvPr>
+        </p:nvSpPr>
+        <p:spPr>
+          <a:xfrm>
+            <a:off x="0" y="0"/>
+            <a:ext cx="2971800" cy="458788"/>
+          </a:xfrm>
+          <a:prstGeom prst="rect">
+            <a:avLst/>
+          </a:prstGeom>
+        </p:spPr>
+        <p:txBody>
+          <a:bodyPr vert="horz" lIns="91440" tIns="45720" rIns="91440" bIns="45720" rtlCol="0"/>
+          <a:lstStyle>
+            <a:lvl1pPr algn="l">
+              <a:defRPr sz="1200"/>
+            </a:lvl1pPr>
+          </a:lstStyle>
+          <a:p>
+            <a:endParaRPr lang="en-US"/>
+          </a:p>
+        </p:txBody>
+      </p:sp>
+      <p:sp>
+        <p:nvSpPr>
+          <p:cNvPr id="3" name="Date Placeholder 2"/>
+          <p:cNvSpPr>
+            <a:spLocks noGrp="1"/>
+          </p:cNvSpPr>
+          <p:nvPr>
+            <p:ph type="dt" idx="1"/>
+          </p:nvPr>
+        </p:nvSpPr>
+        <p:spPr>
+          <a:xfrm>
+            <a:off x="3884613" y="0"/>
+            <a:ext cx="2971800" cy="458788"/>
+          </a:xfrm>
+          <a:prstGeom prst="rect">
+            <a:avLst/>
+          </a:prstGeom>
+        </p:spPr>
+        <p:txBody>
+          <a:bodyPr vert="horz" lIns="91440" tIns="45720" rIns="91440" bIns="45720" rtlCol="0"/>
+          <a:lstStyle>
+            <a:lvl1pPr algn="r">
+              <a:defRPr sz="1200"/>
+            </a:lvl1pPr>
+          </a:lstStyle>
+          <a:p>
+            <a:fld id="{5282F153-3F37-0F45-9E97-73ACFA13230C}" type="datetimeFigureOut">
+              <a:rPr lang="en-US"/>
+              <a:t>7/23/19</a:t>
+            </a:fld>
+            <a:endParaRPr lang="en-US"/>
+          </a:p>
+        </p:txBody>
+      </p:sp>
+      <p:sp>
+        <p:nvSpPr>
+          <p:cNvPr id="4" name="Slide Image Placeholder 3"/>
+          <p:cNvSpPr>
+            <a:spLocks noGrp="1" noRot="1" noChangeAspect="1"/>
+          </p:cNvSpPr>
+          <p:nvPr>
+            <p:ph type="sldImg" idx="2"/>
+          </p:nvPr>
+        </p:nvSpPr>
+        <p:spPr>
+          <a:xfrm>
+            <a:off x="685800" y="1143000"/>
+            <a:ext cx="5486400" cy="3086100"/>
+          </a:xfrm>
+          <a:prstGeom prst="rect">
+            <a:avLst/>
+          </a:prstGeom>
+          <a:noFill/>
+          <a:ln w="12700">
+            <a:solidFill>
+              <a:prstClr val="black"/>
+            </a:solidFill>
+          </a:ln>
+        </p:spPr>
+        <p:txBody>
+          <a:bodyPr vert="horz" lIns="91440" tIns="45720" rIns="91440" bIns="45720" rtlCol="0" anchor="ctr"/>
+          <a:lstStyle/>
+          <a:p>
+            <a:endParaRPr lang="en-US"/>
+          </a:p>
+        </p:txBody>
+      </p:sp>
+      <p:sp>
+        <p:nvSpPr>
+          <p:cNvPr id="5" name="Notes Placeholder 4"/>
+          <p:cNvSpPr>
+            <a:spLocks noGrp="1"/>
+          </p:cNvSpPr>
+          <p:nvPr>
+            <p:ph type="body" sz="quarter" idx="3"/>
+          </p:nvPr>
+        </p:nvSpPr>
+        <p:spPr>
+          <a:xfrm>
+            <a:off x="685800" y="4400550"/>
+            <a:ext cx="5486400" cy="3600450"/>
+          </a:xfrm>
+          <a:prstGeom prst="rect">
+            <a:avLst/>
+          </a:prstGeom>
+        </p:spPr>
+        <p:txBody>
+          <a:bodyPr vert="horz" lIns="91440" tIns="45720" rIns="91440" bIns="45720" rtlCol="0"/>
+          <a:lstStyle/>
+          <a:p>
+            <a:pPr lvl="0"/>
+            <a:r>
+              <a:rPr lang="en-US"/>
+              <a:t>Click to edit Master text styles</a:t>
+            </a:r>
+          </a:p>
+          <a:p>
+            <a:pPr lvl="1"/>
+            <a:r>
+              <a:rPr lang="en-US"/>
+              <a:t>Second level</a:t>
+            </a:r>
+          </a:p>
+          <a:p>
+            <a:pPr lvl="2"/>
+            <a:r>
+              <a:rPr lang="en-US"/>
+              <a:t>Third level</a:t>
+            </a:r>
+          </a:p>
+          <a:p>
+            <a:pPr lvl="3"/>
+            <a:r>
+              <a:rPr lang="en-US"/>
+              <a:t>Fourth level</a:t>
+            </a:r>
+          </a:p>
+          <a:p>
+            <a:pPr lvl="4"/>
+            <a:r>
+              <a:rPr lang="en-US"/>
+              <a:t>Fifth level</a:t>
+            </a:r>
+          </a:p>
+        </p:txBody>
+      </p:sp>
+      <p:sp>
+        <p:nvSpPr>
+          <p:cNvPr id="6" name="Footer Placeholder 5"/>
+          <p:cNvSpPr>
+            <a:spLocks noGrp="1"/>
+          </p:cNvSpPr>
+          <p:nvPr>
+            <p:ph type="ftr" sz="quarter" idx="4"/>
+          </p:nvPr>
+        </p:nvSpPr>
+        <p:spPr>
+          <a:xfrm>
+            <a:off x="0" y="8685213"/>
+            <a:ext cx="2971800" cy="458787"/>
+          </a:xfrm>
+          <a:prstGeom prst="rect">
+            <a:avLst/>
+          </a:prstGeom>
+        </p:spPr>
+        <p:txBody>
+          <a:bodyPr vert="horz" lIns="91440" tIns="45720" rIns="91440" bIns="45720" rtlCol="0" anchor="b"/>
+          <a:lstStyle>
+            <a:lvl1pPr algn="l">
+              <a:defRPr sz="1200"/>
+            </a:lvl1pPr>
+          </a:lstStyle>
+          <a:p>
+            <a:endParaRPr lang="en-US"/>
+          </a:p>
+        </p:txBody>
+      </p:sp>
+      <p:sp>
+        <p:nvSpPr>
+          <p:cNvPr id="7" name="Slide Number Placeholder 6"/>
+          <p:cNvSpPr>
+            <a:spLocks noGrp="1"/>
+          </p:cNvSpPr>
+          <p:nvPr>
+            <p:ph type="sldNum" sz="quarter" idx="5"/>
+          </p:nvPr>
+        </p:nvSpPr>
+        <p:spPr>
+          <a:xfrm>
+            <a:off x="3884613" y="8685213"/>
+            <a:ext cx="2971800" cy="458787"/>
+          </a:xfrm>
+          <a:prstGeom prst="rect">
+            <a:avLst/>
+          </a:prstGeom>
+        </p:spPr>
+        <p:txBody>
+          <a:bodyPr vert="horz" lIns="91440" tIns="45720" rIns="91440" bIns="45720" rtlCol="0" anchor="b"/>
+          <a:lstStyle>
+            <a:lvl1pPr algn="r">
+              <a:defRPr sz="1200"/>
+            </a:lvl1pPr>
+          </a:lstStyle>
+          <a:p>
+            <a:fld id="{CE5E9CC1-C706-0F49-92D6-E571CC5EEA8F}" type="slidenum">
+              <a:rPr lang="en-US"/>
+              <a:t>‹#›</a:t>
+            </a:fld>
+            <a:endParaRPr lang="en-US"/>
+          </a:p>
+        </p:txBody>
+      </p:sp>
     </p:spTree>
     <p:extLst>
       <p:ext uri="{BB962C8B-B14F-4D97-AF65-F5344CB8AC3E}">
-        <p14:creationId xmlns:p14="http://schemas.microsoft.com/office/powerpoint/2010/main" val="186647934"/>
+        <p14:creationId xmlns:p14="http://schemas.microsoft.com/office/powerpoint/2010/main" val="1024086991"/>
       </p:ext>
     </p:extLst>
   </p:cSld>
@@ -293,6 +512,10 @@
           <a:bodyPr/>
           <a:lstStyle/>
           <a:p>
+            <a:r>
+              <a:rPr lang="en-US" dirty="0"/>
+              <a:t/>
+            </a:r>
             <a:endParaRPr lang="en-US" dirty="0"/>
           </a:p>
         </p:txBody>
@@ -377,6 +600,10 @@
           <a:bodyPr/>
           <a:lstStyle/>
           <a:p>
+            <a:r>
+              <a:rPr lang="en-US" dirty="0"/>
+              <a:t/>
+            </a:r>
             <a:endParaRPr lang="en-US" dirty="0"/>
           </a:p>
         </p:txBody>
@@ -461,6 +688,10 @@
           <a:bodyPr/>
           <a:lstStyle/>
           <a:p>
+            <a:r>
+              <a:rPr lang="en-US" dirty="0"/>
+              <a:t/>
+            </a:r>
             <a:endParaRPr lang="en-US" dirty="0"/>
           </a:p>
         </p:txBody>
@@ -545,6 +776,10 @@
           <a:bodyPr/>
           <a:lstStyle/>
           <a:p>
+            <a:r>
+              <a:rPr lang="en-US" dirty="0"/>
+              <a:t/>
+            </a:r>
             <a:endParaRPr lang="en-US" dirty="0"/>
           </a:p>
         </p:txBody>
@@ -629,6 +864,10 @@
           <a:bodyPr/>
           <a:lstStyle/>
           <a:p>
+            <a:r>
+              <a:rPr lang="en-US" dirty="0"/>
+              <a:t/>
+            </a:r>
             <a:endParaRPr lang="en-US" dirty="0"/>
           </a:p>
         </p:txBody>
@@ -713,6 +952,10 @@
           <a:bodyPr/>
           <a:lstStyle/>
           <a:p>
+            <a:r>
+              <a:rPr lang="en-US" dirty="0"/>
+              <a:t/>
+            </a:r>
             <a:endParaRPr lang="en-US" dirty="0"/>
           </a:p>
         </p:txBody>
@@ -797,6 +1040,10 @@
           <a:bodyPr/>
           <a:lstStyle/>
           <a:p>
+            <a:r>
+              <a:rPr lang="en-US" dirty="0"/>
+              <a:t/>
+            </a:r>
             <a:endParaRPr lang="en-US" dirty="0"/>
           </a:p>
         </p:txBody>
@@ -881,6 +1128,10 @@
           <a:bodyPr/>
           <a:lstStyle/>
           <a:p>
+            <a:r>
+              <a:rPr lang="en-US" dirty="0"/>
+              <a:t/>
+            </a:r>
             <a:endParaRPr lang="en-US" dirty="0"/>
           </a:p>
         </p:txBody>
@@ -965,6 +1216,10 @@
           <a:bodyPr/>
           <a:lstStyle/>
           <a:p>
+            <a:r>
+              <a:rPr lang="en-US" dirty="0"/>
+              <a:t/>
+            </a:r>
             <a:endParaRPr lang="en-US" dirty="0"/>
           </a:p>
         </p:txBody>
@@ -1049,6 +1304,10 @@
           <a:bodyPr/>
           <a:lstStyle/>
           <a:p>
+            <a:r>
+              <a:rPr lang="en-US" dirty="0"/>
+              <a:t/>
+            </a:r>
             <a:endParaRPr lang="en-US" dirty="0"/>
           </a:p>
         </p:txBody>
@@ -1133,6 +1392,10 @@
           <a:bodyPr/>
           <a:lstStyle/>
           <a:p>
+            <a:r>
+              <a:rPr lang="en-US" dirty="0"/>
+              <a:t/>
+            </a:r>
             <a:endParaRPr lang="en-US" dirty="0"/>
           </a:p>
         </p:txBody>
@@ -1217,6 +1480,10 @@
           <a:bodyPr/>
           <a:lstStyle/>
           <a:p>
+            <a:r>
+              <a:rPr lang="en-US" dirty="0"/>
+              <a:t/>
+            </a:r>
             <a:endParaRPr lang="en-US" dirty="0"/>
           </a:p>
         </p:txBody>
@@ -1301,6 +1568,10 @@
           <a:bodyPr/>
           <a:lstStyle/>
           <a:p>
+            <a:r>
+              <a:rPr lang="en-US" dirty="0"/>
+              <a:t/>
+            </a:r>
             <a:endParaRPr lang="en-US" dirty="0"/>
           </a:p>
         </p:txBody>
@@ -1374,11 +1645,6 @@
 <file path=ppt/slideMasters/slideMaster1.xml><?xml version="1.0" encoding="utf-8"?>
 <p:sldMaster xmlns:a="http://schemas.openxmlformats.org/drawingml/2006/main" xmlns:r="http://schemas.openxmlformats.org/officeDocument/2006/relationships" xmlns:p="http://schemas.openxmlformats.org/presentationml/2006/main">
   <p:cSld>
-    <p:bg>
-      <p:bgRef idx="1001">
-        <a:schemeClr val="bg1"/>
-      </p:bgRef>
-    </p:bg>
     <p:spTree>
       <p:nvGrpSpPr>
         <p:cNvPr id="1" name=""/>
@@ -1736,11 +2002,11 @@
           <a:bodyPr wrap="square" rtlCol="0" anchor="ctr"/>
           <a:lstStyle/>
           <a:p>
-            <a:pPr marL="0" indent="0" algn="ctr">
-              <a:buNone/>
-            </a:pPr>
-            <a:r>
-              <a:rPr lang="en-US" sz="1400" kern="0" spc="600" dirty="0">
+            <a:pPr algn="ctr" indent="0" marL="0">
+              <a:buNone/>
+            </a:pPr>
+            <a:r>
+              <a:rPr lang="en-US" sz="1400" spc="600" kern="0" dirty="0">
                 <a:solidFill>
                   <a:srgbClr val="4CAF50"/>
                 </a:solidFill>
@@ -1775,7 +2041,7 @@
           <a:bodyPr wrap="square" rtlCol="0" anchor="ctr"/>
           <a:lstStyle/>
           <a:p>
-            <a:pPr marL="0" indent="0" algn="ctr">
+            <a:pPr algn="ctr" indent="0" marL="0">
               <a:buNone/>
             </a:pPr>
             <a:r>
@@ -1814,7 +2080,7 @@
           <a:bodyPr wrap="square" rtlCol="0" anchor="ctr"/>
           <a:lstStyle/>
           <a:p>
-            <a:pPr marL="0" indent="0" algn="ctr">
+            <a:pPr algn="ctr" indent="0" marL="0">
               <a:buNone/>
             </a:pPr>
             <a:r>
@@ -1876,7 +2142,7 @@
           <a:bodyPr wrap="square" rtlCol="0" anchor="ctr"/>
           <a:lstStyle/>
           <a:p>
-            <a:pPr marL="0" indent="0" algn="ctr">
+            <a:pPr algn="ctr" indent="0" marL="0">
               <a:buNone/>
             </a:pPr>
             <a:r>
@@ -1960,11 +2226,11 @@
           <a:bodyPr wrap="square" rtlCol="0" anchor="ctr"/>
           <a:lstStyle/>
           <a:p>
-            <a:pPr marL="0" indent="0">
-              <a:buNone/>
-            </a:pPr>
-            <a:r>
-              <a:rPr lang="en-US" sz="1000" kern="0" spc="400" dirty="0">
+            <a:pPr indent="0" marL="0">
+              <a:buNone/>
+            </a:pPr>
+            <a:r>
+              <a:rPr lang="en-US" sz="1000" spc="400" kern="0" dirty="0">
                 <a:solidFill>
                   <a:srgbClr val="4CAF50"/>
                 </a:solidFill>
@@ -1999,7 +2265,7 @@
           <a:bodyPr wrap="square" rtlCol="0" anchor="ctr"/>
           <a:lstStyle/>
           <a:p>
-            <a:pPr marL="0" indent="0">
+            <a:pPr indent="0" marL="0">
               <a:buNone/>
             </a:pPr>
             <a:r>
@@ -2038,7 +2304,7 @@
           <a:bodyPr wrap="square" rtlCol="0" anchor="ctr"/>
           <a:lstStyle/>
           <a:p>
-            <a:pPr marL="0" indent="0">
+            <a:pPr indent="0" marL="0">
               <a:buNone/>
             </a:pPr>
             <a:r>
@@ -2077,7 +2343,7 @@
           <a:bodyPr wrap="square" rtlCol="0" anchor="ctr"/>
           <a:lstStyle/>
           <a:p>
-            <a:pPr marL="0" indent="0">
+            <a:pPr indent="0" marL="0">
               <a:buNone/>
             </a:pPr>
             <a:r>
@@ -2116,7 +2382,7 @@
           <a:bodyPr wrap="square" rtlCol="0" anchor="ctr"/>
           <a:lstStyle/>
           <a:p>
-            <a:pPr marL="0" indent="0">
+            <a:pPr indent="0" marL="0">
               <a:buNone/>
             </a:pPr>
             <a:r>
@@ -2155,7 +2421,7 @@
           <a:bodyPr wrap="square" rtlCol="0" anchor="ctr"/>
           <a:lstStyle/>
           <a:p>
-            <a:pPr marL="0" indent="0">
+            <a:pPr indent="0" marL="0">
               <a:buNone/>
             </a:pPr>
             <a:r>
@@ -2194,7 +2460,7 @@
           <a:bodyPr wrap="square" rtlCol="0" anchor="ctr"/>
           <a:lstStyle/>
           <a:p>
-            <a:pPr marL="0" indent="0">
+            <a:pPr indent="0" marL="0">
               <a:buNone/>
             </a:pPr>
             <a:r>
@@ -2233,7 +2499,7 @@
           <a:bodyPr wrap="square" rtlCol="0" anchor="ctr"/>
           <a:lstStyle/>
           <a:p>
-            <a:pPr marL="0" indent="0">
+            <a:pPr indent="0" marL="0">
               <a:buNone/>
             </a:pPr>
             <a:r>
@@ -2272,7 +2538,7 @@
           <a:bodyPr wrap="square" rtlCol="0" anchor="ctr"/>
           <a:lstStyle/>
           <a:p>
-            <a:pPr marL="0" indent="0">
+            <a:pPr indent="0" marL="0">
               <a:buNone/>
             </a:pPr>
             <a:r>
@@ -2311,7 +2577,7 @@
           <a:bodyPr wrap="square" rtlCol="0" anchor="ctr"/>
           <a:lstStyle/>
           <a:p>
-            <a:pPr marL="0" indent="0">
+            <a:pPr indent="0" marL="0">
               <a:buNone/>
             </a:pPr>
             <a:r>
@@ -2373,7 +2639,7 @@
           <a:bodyPr wrap="square" rtlCol="0" anchor="ctr"/>
           <a:lstStyle/>
           <a:p>
-            <a:pPr marL="0" indent="0">
+            <a:pPr indent="0" marL="0">
               <a:buNone/>
             </a:pPr>
             <a:r>
@@ -2412,7 +2678,7 @@
           <a:bodyPr wrap="square" rtlCol="0" anchor="ctr"/>
           <a:lstStyle/>
           <a:p>
-            <a:pPr marL="0" indent="0">
+            <a:pPr indent="0" marL="0">
               <a:buNone/>
             </a:pPr>
             <a:r>
@@ -2424,7 +2690,7 @@
                 <a:ea typeface="Arial" pitchFamily="34" charset="-122"/>
                 <a:cs typeface="Arial" pitchFamily="34" charset="-120"/>
               </a:rPr>
-              <a:t>¥68x30万 + ¥98x15万 + DLC+内购 约4510万（保守估计）</a:t>
+              <a:t>¥68x30万 + ¥98x15万 + DLC+内购 约4500万（保守估计）</a:t>
             </a:r>
             <a:endParaRPr lang="en-US" sz="1200" dirty="0"/>
           </a:p>
@@ -2451,7 +2717,7 @@
           <a:bodyPr wrap="square" rtlCol="0" anchor="ctr"/>
           <a:lstStyle/>
           <a:p>
-            <a:pPr marL="0" indent="0" algn="r">
+            <a:pPr algn="r" indent="0" marL="0">
               <a:buNone/>
             </a:pPr>
             <a:r>
@@ -2535,11 +2801,11 @@
           <a:bodyPr wrap="square" rtlCol="0" anchor="ctr"/>
           <a:lstStyle/>
           <a:p>
-            <a:pPr marL="0" indent="0">
-              <a:buNone/>
-            </a:pPr>
-            <a:r>
-              <a:rPr lang="en-US" sz="1000" kern="0" spc="400" dirty="0">
+            <a:pPr indent="0" marL="0">
+              <a:buNone/>
+            </a:pPr>
+            <a:r>
+              <a:rPr lang="en-US" sz="1000" spc="400" kern="0" dirty="0">
                 <a:solidFill>
                   <a:srgbClr val="4CAF50"/>
                 </a:solidFill>
@@ -2574,7 +2840,7 @@
           <a:bodyPr wrap="square" rtlCol="0" anchor="ctr"/>
           <a:lstStyle/>
           <a:p>
-            <a:pPr marL="0" indent="0">
+            <a:pPr indent="0" marL="0">
               <a:buNone/>
             </a:pPr>
             <a:r>
@@ -2613,7 +2879,7 @@
           <a:bodyPr wrap="square" rtlCol="0" anchor="ctr"/>
           <a:lstStyle/>
           <a:p>
-            <a:pPr marL="0" indent="0">
+            <a:pPr indent="0" marL="0">
               <a:buNone/>
             </a:pPr>
             <a:r>
@@ -2652,7 +2918,7 @@
           <a:bodyPr wrap="square" rtlCol="0" anchor="ctr"/>
           <a:lstStyle/>
           <a:p>
-            <a:pPr marL="0" indent="0">
+            <a:pPr indent="0" marL="0">
               <a:buNone/>
             </a:pPr>
             <a:r>
@@ -2691,7 +2957,7 @@
           <a:bodyPr wrap="square" rtlCol="0" anchor="ctr"/>
           <a:lstStyle/>
           <a:p>
-            <a:pPr marL="0" indent="0">
+            <a:pPr indent="0" marL="0">
               <a:buNone/>
             </a:pPr>
             <a:r>
@@ -2730,7 +2996,7 @@
           <a:bodyPr wrap="square" rtlCol="0" anchor="ctr"/>
           <a:lstStyle/>
           <a:p>
-            <a:pPr marL="0" indent="0" algn="r">
+            <a:pPr algn="r" indent="0" marL="0">
               <a:buNone/>
             </a:pPr>
             <a:r>
@@ -2742,7 +3008,7 @@
                 <a:ea typeface="Arial" pitchFamily="34" charset="-122"/>
                 <a:cs typeface="Arial" pitchFamily="34" charset="-120"/>
               </a:rPr>
-              <a:t>10-20万</a:t>
+              <a:t>15-25万</a:t>
             </a:r>
             <a:endParaRPr lang="en-US" sz="1100" dirty="0"/>
           </a:p>
@@ -2809,7 +3075,7 @@
           <a:bodyPr wrap="square" rtlCol="0" anchor="ctr"/>
           <a:lstStyle/>
           <a:p>
-            <a:pPr marL="0" indent="0">
+            <a:pPr indent="0" marL="0">
               <a:buNone/>
             </a:pPr>
             <a:r>
@@ -2848,7 +3114,7 @@
           <a:bodyPr wrap="square" rtlCol="0" anchor="ctr"/>
           <a:lstStyle/>
           <a:p>
-            <a:pPr marL="0" indent="0">
+            <a:pPr indent="0" marL="0">
               <a:buNone/>
             </a:pPr>
             <a:r>
@@ -2887,7 +3153,7 @@
           <a:bodyPr wrap="square" rtlCol="0" anchor="ctr"/>
           <a:lstStyle/>
           <a:p>
-            <a:pPr marL="0" indent="0">
+            <a:pPr indent="0" marL="0">
               <a:buNone/>
             </a:pPr>
             <a:r>
@@ -2926,7 +3192,7 @@
           <a:bodyPr wrap="square" rtlCol="0" anchor="ctr"/>
           <a:lstStyle/>
           <a:p>
-            <a:pPr marL="0" indent="0" algn="r">
+            <a:pPr algn="r" indent="0" marL="0">
               <a:buNone/>
             </a:pPr>
             <a:r>
@@ -3005,7 +3271,7 @@
           <a:bodyPr wrap="square" rtlCol="0" anchor="ctr"/>
           <a:lstStyle/>
           <a:p>
-            <a:pPr marL="0" indent="0">
+            <a:pPr indent="0" marL="0">
               <a:buNone/>
             </a:pPr>
             <a:r>
@@ -3044,7 +3310,7 @@
           <a:bodyPr wrap="square" rtlCol="0" anchor="ctr"/>
           <a:lstStyle/>
           <a:p>
-            <a:pPr marL="0" indent="0">
+            <a:pPr indent="0" marL="0">
               <a:buNone/>
             </a:pPr>
             <a:r>
@@ -3083,7 +3349,7 @@
           <a:bodyPr wrap="square" rtlCol="0" anchor="ctr"/>
           <a:lstStyle/>
           <a:p>
-            <a:pPr marL="0" indent="0">
+            <a:pPr indent="0" marL="0">
               <a:buNone/>
             </a:pPr>
             <a:r>
@@ -3122,7 +3388,7 @@
           <a:bodyPr wrap="square" rtlCol="0" anchor="ctr"/>
           <a:lstStyle/>
           <a:p>
-            <a:pPr marL="0" indent="0" algn="r">
+            <a:pPr algn="r" indent="0" marL="0">
               <a:buNone/>
             </a:pPr>
             <a:r>
@@ -3201,7 +3467,7 @@
           <a:bodyPr wrap="square" rtlCol="0" anchor="ctr"/>
           <a:lstStyle/>
           <a:p>
-            <a:pPr marL="0" indent="0">
+            <a:pPr indent="0" marL="0">
               <a:buNone/>
             </a:pPr>
             <a:r>
@@ -3240,7 +3506,7 @@
           <a:bodyPr wrap="square" rtlCol="0" anchor="ctr"/>
           <a:lstStyle/>
           <a:p>
-            <a:pPr marL="0" indent="0">
+            <a:pPr indent="0" marL="0">
               <a:buNone/>
             </a:pPr>
             <a:r>
@@ -3279,7 +3545,7 @@
           <a:bodyPr wrap="square" rtlCol="0" anchor="ctr"/>
           <a:lstStyle/>
           <a:p>
-            <a:pPr marL="0" indent="0">
+            <a:pPr indent="0" marL="0">
               <a:buNone/>
             </a:pPr>
             <a:r>
@@ -3318,7 +3584,7 @@
           <a:bodyPr wrap="square" rtlCol="0" anchor="ctr"/>
           <a:lstStyle/>
           <a:p>
-            <a:pPr marL="0" indent="0" algn="r">
+            <a:pPr algn="r" indent="0" marL="0">
               <a:buNone/>
             </a:pPr>
             <a:r>
@@ -3397,7 +3663,7 @@
           <a:bodyPr wrap="square" rtlCol="0" anchor="ctr"/>
           <a:lstStyle/>
           <a:p>
-            <a:pPr marL="0" indent="0">
+            <a:pPr indent="0" marL="0">
               <a:buNone/>
             </a:pPr>
             <a:r>
@@ -3436,7 +3702,7 @@
           <a:bodyPr wrap="square" rtlCol="0" anchor="ctr"/>
           <a:lstStyle/>
           <a:p>
-            <a:pPr marL="0" indent="0">
+            <a:pPr indent="0" marL="0">
               <a:buNone/>
             </a:pPr>
             <a:r>
@@ -3475,7 +3741,7 @@
           <a:bodyPr wrap="square" rtlCol="0" anchor="ctr"/>
           <a:lstStyle/>
           <a:p>
-            <a:pPr marL="0" indent="0">
+            <a:pPr indent="0" marL="0">
               <a:buNone/>
             </a:pPr>
             <a:r>
@@ -3514,7 +3780,7 @@
           <a:bodyPr wrap="square" rtlCol="0" anchor="ctr"/>
           <a:lstStyle/>
           <a:p>
-            <a:pPr marL="0" indent="0" algn="r">
+            <a:pPr algn="r" indent="0" marL="0">
               <a:buNone/>
             </a:pPr>
             <a:r>
@@ -3593,7 +3859,7 @@
           <a:bodyPr wrap="square" rtlCol="0" anchor="ctr"/>
           <a:lstStyle/>
           <a:p>
-            <a:pPr marL="0" indent="0" algn="ctr">
+            <a:pPr algn="ctr" indent="0" marL="0">
               <a:buNone/>
             </a:pPr>
             <a:r>
@@ -3632,7 +3898,7 @@
           <a:bodyPr wrap="square" rtlCol="0" anchor="ctr"/>
           <a:lstStyle/>
           <a:p>
-            <a:pPr marL="0" indent="0" algn="r">
+            <a:pPr algn="r" indent="0" marL="0">
               <a:buNone/>
             </a:pPr>
             <a:r>
@@ -3716,11 +3982,11 @@
           <a:bodyPr wrap="square" rtlCol="0" anchor="ctr"/>
           <a:lstStyle/>
           <a:p>
-            <a:pPr marL="0" indent="0">
-              <a:buNone/>
-            </a:pPr>
-            <a:r>
-              <a:rPr lang="en-US" sz="1000" kern="0" spc="400" dirty="0">
+            <a:pPr indent="0" marL="0">
+              <a:buNone/>
+            </a:pPr>
+            <a:r>
+              <a:rPr lang="en-US" sz="1000" spc="400" kern="0" dirty="0">
                 <a:solidFill>
                   <a:srgbClr val="4CAF50"/>
                 </a:solidFill>
@@ -3755,7 +4021,7 @@
           <a:bodyPr wrap="square" rtlCol="0" anchor="ctr"/>
           <a:lstStyle/>
           <a:p>
-            <a:pPr marL="0" indent="0">
+            <a:pPr indent="0" marL="0">
               <a:buNone/>
             </a:pPr>
             <a:r>
@@ -3794,7 +4060,7 @@
           <a:bodyPr wrap="square" rtlCol="0" anchor="ctr"/>
           <a:lstStyle/>
           <a:p>
-            <a:pPr marL="0" indent="0">
+            <a:pPr indent="0" marL="0">
               <a:buNone/>
             </a:pPr>
             <a:r>
@@ -3833,7 +4099,7 @@
           <a:bodyPr wrap="square" rtlCol="0" anchor="ctr"/>
           <a:lstStyle/>
           <a:p>
-            <a:pPr marL="0" indent="0">
+            <a:pPr indent="0" marL="0">
               <a:buNone/>
             </a:pPr>
             <a:r>
@@ -3872,7 +4138,7 @@
           <a:bodyPr wrap="square" rtlCol="0" anchor="ctr"/>
           <a:lstStyle/>
           <a:p>
-            <a:pPr marL="0" indent="0">
+            <a:pPr indent="0" marL="0">
               <a:buNone/>
             </a:pPr>
             <a:r>
@@ -3931,7 +4197,7 @@
           <a:bodyPr wrap="square" rtlCol="0" anchor="ctr"/>
           <a:lstStyle/>
           <a:p>
-            <a:pPr marL="0" indent="0">
+            <a:pPr indent="0" marL="0">
               <a:buNone/>
             </a:pPr>
             <a:r>
@@ -3990,7 +4256,7 @@
           <a:bodyPr wrap="square" rtlCol="0" anchor="ctr"/>
           <a:lstStyle/>
           <a:p>
-            <a:pPr marL="0" indent="0">
+            <a:pPr indent="0" marL="0">
               <a:buNone/>
             </a:pPr>
             <a:r>
@@ -4049,7 +4315,7 @@
           <a:bodyPr wrap="square" rtlCol="0" anchor="ctr"/>
           <a:lstStyle/>
           <a:p>
-            <a:pPr marL="0" indent="0">
+            <a:pPr indent="0" marL="0">
               <a:buNone/>
             </a:pPr>
             <a:r>
@@ -4108,7 +4374,7 @@
           <a:bodyPr wrap="square" rtlCol="0" anchor="ctr"/>
           <a:lstStyle/>
           <a:p>
-            <a:pPr marL="0" indent="0">
+            <a:pPr indent="0" marL="0">
               <a:buNone/>
             </a:pPr>
             <a:r>
@@ -4120,7 +4386,7 @@
                 <a:ea typeface="Arial" pitchFamily="34" charset="-122"/>
                 <a:cs typeface="Arial" pitchFamily="34" charset="-120"/>
               </a:rPr>
-              <a:t>种子投资（约20-30万）</a:t>
+              <a:t>种子投资（概念视觉化15-25万，融资结构另议）</a:t>
             </a:r>
             <a:endParaRPr lang="en-US" sz="1200" dirty="0"/>
           </a:p>
@@ -4147,7 +4413,7 @@
           <a:bodyPr wrap="square" rtlCol="0" anchor="ctr"/>
           <a:lstStyle/>
           <a:p>
-            <a:pPr marL="0" indent="0" algn="r">
+            <a:pPr algn="r" indent="0" marL="0">
               <a:buNone/>
             </a:pPr>
             <a:r>
@@ -4231,7 +4497,7 @@
           <a:bodyPr wrap="square" rtlCol="0" anchor="ctr"/>
           <a:lstStyle/>
           <a:p>
-            <a:pPr marL="0" indent="0" algn="ctr">
+            <a:pPr algn="ctr" indent="0" marL="0">
               <a:buNone/>
             </a:pPr>
             <a:r>
@@ -4270,7 +4536,7 @@
           <a:bodyPr wrap="square" rtlCol="0" anchor="ctr"/>
           <a:lstStyle/>
           <a:p>
-            <a:pPr marL="0" indent="0" algn="ctr">
+            <a:pPr algn="ctr" indent="0" marL="0">
               <a:buNone/>
             </a:pPr>
             <a:r>
@@ -4332,7 +4598,7 @@
           <a:bodyPr wrap="square" rtlCol="0" anchor="ctr"/>
           <a:lstStyle/>
           <a:p>
-            <a:pPr marL="0" indent="0" algn="ctr">
+            <a:pPr algn="ctr" indent="0" marL="0">
               <a:buNone/>
             </a:pPr>
             <a:r>
@@ -4371,7 +4637,7 @@
           <a:bodyPr wrap="square" rtlCol="0" anchor="ctr"/>
           <a:lstStyle/>
           <a:p>
-            <a:pPr marL="0" indent="0" algn="r">
+            <a:pPr algn="r" indent="0" marL="0">
               <a:buNone/>
             </a:pPr>
             <a:r>
@@ -4455,7 +4721,7 @@
           <a:bodyPr wrap="square" rtlCol="0" anchor="ctr"/>
           <a:lstStyle/>
           <a:p>
-            <a:pPr marL="0" indent="0" algn="ctr">
+            <a:pPr algn="ctr" indent="0" marL="0">
               <a:buNone/>
             </a:pPr>
             <a:r>
@@ -4494,7 +4760,7 @@
           <a:bodyPr wrap="square" rtlCol="0" anchor="ctr"/>
           <a:lstStyle/>
           <a:p>
-            <a:pPr marL="0" indent="0" algn="ctr">
+            <a:pPr algn="ctr" indent="0" marL="0">
               <a:buNone/>
             </a:pPr>
             <a:r>
@@ -4556,7 +4822,7 @@
           <a:bodyPr wrap="square" rtlCol="0" anchor="ctr"/>
           <a:lstStyle/>
           <a:p>
-            <a:pPr marL="0" indent="0" algn="r">
+            <a:pPr algn="r" indent="0" marL="0">
               <a:buNone/>
             </a:pPr>
             <a:r>
@@ -4640,11 +4906,11 @@
           <a:bodyPr wrap="square" rtlCol="0" anchor="ctr"/>
           <a:lstStyle/>
           <a:p>
-            <a:pPr marL="0" indent="0">
-              <a:buNone/>
-            </a:pPr>
-            <a:r>
-              <a:rPr lang="en-US" sz="1000" kern="0" spc="400" dirty="0">
+            <a:pPr indent="0" marL="0">
+              <a:buNone/>
+            </a:pPr>
+            <a:r>
+              <a:rPr lang="en-US" sz="1000" spc="400" kern="0" dirty="0">
                 <a:solidFill>
                   <a:srgbClr val="4CAF50"/>
                 </a:solidFill>
@@ -4679,7 +4945,7 @@
           <a:bodyPr wrap="square" rtlCol="0" anchor="ctr"/>
           <a:lstStyle/>
           <a:p>
-            <a:pPr marL="0" indent="0">
+            <a:pPr indent="0" marL="0">
               <a:buNone/>
             </a:pPr>
             <a:r>
@@ -4738,7 +5004,7 @@
           <a:bodyPr wrap="square" rtlCol="0" anchor="ctr"/>
           <a:lstStyle/>
           <a:p>
-            <a:pPr marL="0" indent="0">
+            <a:pPr indent="0" marL="0">
               <a:buNone/>
             </a:pPr>
             <a:r>
@@ -4777,7 +5043,7 @@
           <a:bodyPr wrap="square" rtlCol="0" anchor="ctr"/>
           <a:lstStyle/>
           <a:p>
-            <a:pPr marL="0" indent="0">
+            <a:pPr indent="0" marL="0">
               <a:buNone/>
             </a:pPr>
             <a:r>
@@ -4836,7 +5102,7 @@
           <a:bodyPr wrap="square" rtlCol="0" anchor="ctr"/>
           <a:lstStyle/>
           <a:p>
-            <a:pPr marL="0" indent="0">
+            <a:pPr indent="0" marL="0">
               <a:buNone/>
             </a:pPr>
             <a:r>
@@ -4875,7 +5141,7 @@
           <a:bodyPr wrap="square" rtlCol="0" anchor="ctr"/>
           <a:lstStyle/>
           <a:p>
-            <a:pPr marL="0" indent="0">
+            <a:pPr indent="0" marL="0">
               <a:buNone/>
             </a:pPr>
             <a:r>
@@ -4934,7 +5200,7 @@
           <a:bodyPr wrap="square" rtlCol="0" anchor="ctr"/>
           <a:lstStyle/>
           <a:p>
-            <a:pPr marL="0" indent="0">
+            <a:pPr indent="0" marL="0">
               <a:buNone/>
             </a:pPr>
             <a:r>
@@ -4973,7 +5239,7 @@
           <a:bodyPr wrap="square" rtlCol="0" anchor="ctr"/>
           <a:lstStyle/>
           <a:p>
-            <a:pPr marL="0" indent="0">
+            <a:pPr indent="0" marL="0">
               <a:buNone/>
             </a:pPr>
             <a:r>
@@ -5032,7 +5298,7 @@
           <a:bodyPr wrap="square" rtlCol="0" anchor="ctr"/>
           <a:lstStyle/>
           <a:p>
-            <a:pPr marL="0" indent="0">
+            <a:pPr indent="0" marL="0">
               <a:buNone/>
             </a:pPr>
             <a:r>
@@ -5071,7 +5337,7 @@
           <a:bodyPr wrap="square" rtlCol="0" anchor="ctr"/>
           <a:lstStyle/>
           <a:p>
-            <a:pPr marL="0" indent="0">
+            <a:pPr indent="0" marL="0">
               <a:buNone/>
             </a:pPr>
             <a:r>
@@ -5110,7 +5376,7 @@
           <a:bodyPr wrap="square" rtlCol="0" anchor="ctr"/>
           <a:lstStyle/>
           <a:p>
-            <a:pPr marL="0" indent="0" algn="r">
+            <a:pPr algn="r" indent="0" marL="0">
               <a:buNone/>
             </a:pPr>
             <a:r>
@@ -5194,11 +5460,11 @@
           <a:bodyPr wrap="square" rtlCol="0" anchor="ctr"/>
           <a:lstStyle/>
           <a:p>
-            <a:pPr marL="0" indent="0">
-              <a:buNone/>
-            </a:pPr>
-            <a:r>
-              <a:rPr lang="en-US" sz="1000" kern="0" spc="400" dirty="0">
+            <a:pPr indent="0" marL="0">
+              <a:buNone/>
+            </a:pPr>
+            <a:r>
+              <a:rPr lang="en-US" sz="1000" spc="400" kern="0" dirty="0">
                 <a:solidFill>
                   <a:srgbClr val="4CAF50"/>
                 </a:solidFill>
@@ -5233,7 +5499,7 @@
           <a:bodyPr wrap="square" rtlCol="0" anchor="ctr"/>
           <a:lstStyle/>
           <a:p>
-            <a:pPr marL="0" indent="0">
+            <a:pPr indent="0" marL="0">
               <a:buNone/>
             </a:pPr>
             <a:r>
@@ -5297,7 +5563,7 @@
           <a:bodyPr wrap="square" rtlCol="0" anchor="ctr"/>
           <a:lstStyle/>
           <a:p>
-            <a:pPr marL="0" indent="0">
+            <a:pPr indent="0" marL="0">
               <a:buNone/>
             </a:pPr>
             <a:r>
@@ -5336,7 +5602,7 @@
           <a:bodyPr wrap="square" rtlCol="0" anchor="ctr"/>
           <a:lstStyle/>
           <a:p>
-            <a:pPr marL="0" indent="0">
+            <a:pPr indent="0" marL="0">
               <a:buNone/>
             </a:pPr>
             <a:r>
@@ -5375,7 +5641,7 @@
           <a:bodyPr wrap="square" rtlCol="0" anchor="ctr"/>
           <a:lstStyle/>
           <a:p>
-            <a:pPr marL="0" indent="0">
+            <a:pPr indent="0" marL="0">
               <a:buNone/>
             </a:pPr>
             <a:r>
@@ -5414,7 +5680,7 @@
           <a:bodyPr wrap="square" rtlCol="0" anchor="ctr"/>
           <a:lstStyle/>
           <a:p>
-            <a:pPr marL="0" indent="0" algn="ctr">
+            <a:pPr algn="ctr" indent="0" marL="0">
               <a:buNone/>
             </a:pPr>
             <a:r>
@@ -5478,7 +5744,7 @@
           <a:bodyPr wrap="square" rtlCol="0" anchor="ctr"/>
           <a:lstStyle/>
           <a:p>
-            <a:pPr marL="0" indent="0">
+            <a:pPr indent="0" marL="0">
               <a:buNone/>
             </a:pPr>
             <a:r>
@@ -5517,7 +5783,7 @@
           <a:bodyPr wrap="square" rtlCol="0" anchor="ctr"/>
           <a:lstStyle/>
           <a:p>
-            <a:pPr marL="0" indent="0">
+            <a:pPr indent="0" marL="0">
               <a:buNone/>
             </a:pPr>
             <a:r>
@@ -5556,7 +5822,7 @@
           <a:bodyPr wrap="square" rtlCol="0" anchor="ctr"/>
           <a:lstStyle/>
           <a:p>
-            <a:pPr marL="0" indent="0">
+            <a:pPr indent="0" marL="0">
               <a:buNone/>
             </a:pPr>
             <a:r>
@@ -5595,7 +5861,7 @@
           <a:bodyPr wrap="square" rtlCol="0" anchor="ctr"/>
           <a:lstStyle/>
           <a:p>
-            <a:pPr marL="0" indent="0" algn="ctr">
+            <a:pPr algn="ctr" indent="0" marL="0">
               <a:buNone/>
             </a:pPr>
             <a:r>
@@ -5659,7 +5925,7 @@
           <a:bodyPr wrap="square" rtlCol="0" anchor="ctr"/>
           <a:lstStyle/>
           <a:p>
-            <a:pPr marL="0" indent="0">
+            <a:pPr indent="0" marL="0">
               <a:buNone/>
             </a:pPr>
             <a:r>
@@ -5698,7 +5964,7 @@
           <a:bodyPr wrap="square" rtlCol="0" anchor="ctr"/>
           <a:lstStyle/>
           <a:p>
-            <a:pPr marL="0" indent="0">
+            <a:pPr indent="0" marL="0">
               <a:buNone/>
             </a:pPr>
             <a:r>
@@ -5737,7 +6003,7 @@
           <a:bodyPr wrap="square" rtlCol="0" anchor="ctr"/>
           <a:lstStyle/>
           <a:p>
-            <a:pPr marL="0" indent="0">
+            <a:pPr indent="0" marL="0">
               <a:buNone/>
             </a:pPr>
             <a:r>
@@ -5776,7 +6042,7 @@
           <a:bodyPr wrap="square" rtlCol="0" anchor="ctr"/>
           <a:lstStyle/>
           <a:p>
-            <a:pPr marL="0" indent="0" algn="ctr">
+            <a:pPr algn="ctr" indent="0" marL="0">
               <a:buNone/>
             </a:pPr>
             <a:r>
@@ -5815,7 +6081,7 @@
           <a:bodyPr wrap="square" rtlCol="0" anchor="ctr"/>
           <a:lstStyle/>
           <a:p>
-            <a:pPr marL="0" indent="0" algn="r">
+            <a:pPr algn="r" indent="0" marL="0">
               <a:buNone/>
             </a:pPr>
             <a:r>
@@ -5899,11 +6165,11 @@
           <a:bodyPr wrap="square" rtlCol="0" anchor="ctr"/>
           <a:lstStyle/>
           <a:p>
-            <a:pPr marL="0" indent="0">
-              <a:buNone/>
-            </a:pPr>
-            <a:r>
-              <a:rPr lang="en-US" sz="1000" kern="0" spc="400" dirty="0">
+            <a:pPr indent="0" marL="0">
+              <a:buNone/>
+            </a:pPr>
+            <a:r>
+              <a:rPr lang="en-US" sz="1000" spc="400" kern="0" dirty="0">
                 <a:solidFill>
                   <a:srgbClr val="4CAF50"/>
                 </a:solidFill>
@@ -5938,7 +6204,7 @@
           <a:bodyPr wrap="square" rtlCol="0" anchor="ctr"/>
           <a:lstStyle/>
           <a:p>
-            <a:pPr marL="0" indent="0">
+            <a:pPr indent="0" marL="0">
               <a:buNone/>
             </a:pPr>
             <a:r>
@@ -5997,7 +6263,7 @@
           <a:bodyPr wrap="square" rtlCol="0" anchor="ctr"/>
           <a:lstStyle/>
           <a:p>
-            <a:pPr marL="0" indent="0">
+            <a:pPr indent="0" marL="0">
               <a:buNone/>
             </a:pPr>
             <a:r>
@@ -6056,7 +6322,7 @@
           <a:bodyPr wrap="square" rtlCol="0" anchor="ctr"/>
           <a:lstStyle/>
           <a:p>
-            <a:pPr marL="0" indent="0">
+            <a:pPr indent="0" marL="0">
               <a:buNone/>
             </a:pPr>
             <a:r>
@@ -6115,7 +6381,7 @@
           <a:bodyPr wrap="square" rtlCol="0" anchor="ctr"/>
           <a:lstStyle/>
           <a:p>
-            <a:pPr marL="0" indent="0">
+            <a:pPr indent="0" marL="0">
               <a:buNone/>
             </a:pPr>
             <a:r>
@@ -6174,7 +6440,7 @@
           <a:bodyPr wrap="square" rtlCol="0" anchor="ctr"/>
           <a:lstStyle/>
           <a:p>
-            <a:pPr marL="0" indent="0">
+            <a:pPr indent="0" marL="0">
               <a:buNone/>
             </a:pPr>
             <a:r>
@@ -6213,7 +6479,7 @@
           <a:bodyPr wrap="square" rtlCol="0" anchor="ctr"/>
           <a:lstStyle/>
           <a:p>
-            <a:pPr marL="0" indent="0" algn="ctr">
+            <a:pPr algn="ctr" indent="0" marL="0">
               <a:buNone/>
             </a:pPr>
             <a:r>
@@ -6252,7 +6518,7 @@
           <a:bodyPr wrap="square" rtlCol="0" anchor="ctr"/>
           <a:lstStyle/>
           <a:p>
-            <a:pPr marL="0" indent="0" algn="r">
+            <a:pPr algn="r" indent="0" marL="0">
               <a:buNone/>
             </a:pPr>
             <a:r>
@@ -6336,11 +6602,11 @@
           <a:bodyPr wrap="square" rtlCol="0" anchor="ctr"/>
           <a:lstStyle/>
           <a:p>
-            <a:pPr marL="0" indent="0">
-              <a:buNone/>
-            </a:pPr>
-            <a:r>
-              <a:rPr lang="en-US" sz="1000" kern="0" spc="400" dirty="0">
+            <a:pPr indent="0" marL="0">
+              <a:buNone/>
+            </a:pPr>
+            <a:r>
+              <a:rPr lang="en-US" sz="1000" spc="400" kern="0" dirty="0">
                 <a:solidFill>
                   <a:srgbClr val="4CAF50"/>
                 </a:solidFill>
@@ -6375,7 +6641,7 @@
           <a:bodyPr wrap="square" rtlCol="0" anchor="ctr"/>
           <a:lstStyle/>
           <a:p>
-            <a:pPr marL="0" indent="0">
+            <a:pPr indent="0" marL="0">
               <a:buNone/>
             </a:pPr>
             <a:r>
@@ -6387,7 +6653,7 @@
                 <a:ea typeface="Arial" pitchFamily="34" charset="-122"/>
                 <a:cs typeface="Arial" pitchFamily="34" charset="-120"/>
               </a:rPr>
-              <a:t>74章 50万字 已全部完成</a:t>
+              <a:t>74章 正文约23万字 已全部完成</a:t>
             </a:r>
             <a:endParaRPr lang="en-US" sz="2000" dirty="0"/>
           </a:p>
@@ -6437,7 +6703,7 @@
           <a:bodyPr wrap="square" rtlCol="0" anchor="ctr"/>
           <a:lstStyle/>
           <a:p>
-            <a:pPr marL="0" indent="0">
+            <a:pPr indent="0" marL="0">
               <a:buNone/>
             </a:pPr>
             <a:r>
@@ -6476,7 +6742,7 @@
           <a:bodyPr wrap="square" rtlCol="0" anchor="ctr"/>
           <a:lstStyle/>
           <a:p>
-            <a:pPr marL="0" indent="0">
+            <a:pPr indent="0" marL="0">
               <a:buNone/>
             </a:pPr>
             <a:r>
@@ -6489,6 +6755,45 @@
                 <a:cs typeface="Arial" pitchFamily="34" charset="-120"/>
               </a:rPr>
               <a:t>12章 韩执的故事</a:t>
+            </a:r>
+            <a:endParaRPr lang="en-US" sz="900" dirty="0"/>
+          </a:p>
+        </p:txBody>
+      </p:sp>
+      <p:sp>
+        <p:nvSpPr>
+          <p:cNvPr id="8" name="Text 6"/>
+          <p:cNvSpPr/>
+          <p:nvPr/>
+        </p:nvSpPr>
+        <p:spPr>
+          <a:xfrm>
+            <a:off x="548640" y="2103120"/>
+            <a:ext cx="2286000" cy="274320"/>
+          </a:xfrm>
+          <a:prstGeom prst="rect">
+            <a:avLst/>
+          </a:prstGeom>
+          <a:noFill/>
+          <a:ln/>
+        </p:spPr>
+        <p:txBody>
+          <a:bodyPr wrap="square" rtlCol="0" anchor="ctr"/>
+          <a:lstStyle/>
+          <a:p>
+            <a:pPr indent="0" marL="0">
+              <a:buNone/>
+            </a:pPr>
+            <a:r>
+              <a:rPr lang="en-US" sz="900" dirty="0">
+                <a:solidFill>
+                  <a:srgbClr val="888888"/>
+                </a:solidFill>
+                <a:latin typeface="Arial" pitchFamily="34" charset="0"/>
+                <a:ea typeface="Arial" pitchFamily="34" charset="-122"/>
+                <a:cs typeface="Arial" pitchFamily="34" charset="-120"/>
+              </a:rPr>
+              <a:t>4CAF50</a:t>
             </a:r>
             <a:endParaRPr lang="en-US" sz="900" dirty="0"/>
           </a:p>
@@ -6515,7 +6820,7 @@
           <a:bodyPr wrap="square" rtlCol="0" anchor="ctr"/>
           <a:lstStyle/>
           <a:p>
-            <a:pPr marL="0" indent="0">
+            <a:pPr indent="0" marL="0">
               <a:buNone/>
             </a:pPr>
             <a:r>
@@ -6554,7 +6859,7 @@
           <a:bodyPr wrap="square" rtlCol="0" anchor="ctr"/>
           <a:lstStyle/>
           <a:p>
-            <a:pPr marL="0" indent="0">
+            <a:pPr indent="0" marL="0">
               <a:buNone/>
             </a:pPr>
             <a:r>
@@ -6567,6 +6872,45 @@
                 <a:cs typeface="Arial" pitchFamily="34" charset="-120"/>
               </a:rPr>
               <a:t>50章 洛安的故事</a:t>
+            </a:r>
+            <a:endParaRPr lang="en-US" sz="900" dirty="0"/>
+          </a:p>
+        </p:txBody>
+      </p:sp>
+      <p:sp>
+        <p:nvSpPr>
+          <p:cNvPr id="11" name="Text 9"/>
+          <p:cNvSpPr/>
+          <p:nvPr/>
+        </p:nvSpPr>
+        <p:spPr>
+          <a:xfrm>
+            <a:off x="3291840" y="2103120"/>
+            <a:ext cx="2286000" cy="274320"/>
+          </a:xfrm>
+          <a:prstGeom prst="rect">
+            <a:avLst/>
+          </a:prstGeom>
+          <a:noFill/>
+          <a:ln/>
+        </p:spPr>
+        <p:txBody>
+          <a:bodyPr wrap="square" rtlCol="0" anchor="ctr"/>
+          <a:lstStyle/>
+          <a:p>
+            <a:pPr indent="0" marL="0">
+              <a:buNone/>
+            </a:pPr>
+            <a:r>
+              <a:rPr lang="en-US" sz="900" dirty="0">
+                <a:solidFill>
+                  <a:srgbClr val="888888"/>
+                </a:solidFill>
+                <a:latin typeface="Arial" pitchFamily="34" charset="0"/>
+                <a:ea typeface="Arial" pitchFamily="34" charset="-122"/>
+                <a:cs typeface="Arial" pitchFamily="34" charset="-120"/>
+              </a:rPr>
+              <a:t>D4A040</a:t>
             </a:r>
             <a:endParaRPr lang="en-US" sz="900" dirty="0"/>
           </a:p>
@@ -6593,7 +6937,7 @@
           <a:bodyPr wrap="square" rtlCol="0" anchor="ctr"/>
           <a:lstStyle/>
           <a:p>
-            <a:pPr marL="0" indent="0">
+            <a:pPr indent="0" marL="0">
               <a:buNone/>
             </a:pPr>
             <a:r>
@@ -6632,7 +6976,7 @@
           <a:bodyPr wrap="square" rtlCol="0" anchor="ctr"/>
           <a:lstStyle/>
           <a:p>
-            <a:pPr marL="0" indent="0">
+            <a:pPr indent="0" marL="0">
               <a:buNone/>
             </a:pPr>
             <a:r>
@@ -6645,6 +6989,45 @@
                 <a:cs typeface="Arial" pitchFamily="34" charset="-120"/>
               </a:rPr>
               <a:t>12章 裂缝之后</a:t>
+            </a:r>
+            <a:endParaRPr lang="en-US" sz="900" dirty="0"/>
+          </a:p>
+        </p:txBody>
+      </p:sp>
+      <p:sp>
+        <p:nvSpPr>
+          <p:cNvPr id="14" name="Text 12"/>
+          <p:cNvSpPr/>
+          <p:nvPr/>
+        </p:nvSpPr>
+        <p:spPr>
+          <a:xfrm>
+            <a:off x="7406640" y="2103120"/>
+            <a:ext cx="2286000" cy="274320"/>
+          </a:xfrm>
+          <a:prstGeom prst="rect">
+            <a:avLst/>
+          </a:prstGeom>
+          <a:noFill/>
+          <a:ln/>
+        </p:spPr>
+        <p:txBody>
+          <a:bodyPr wrap="square" rtlCol="0" anchor="ctr"/>
+          <a:lstStyle/>
+          <a:p>
+            <a:pPr indent="0" marL="0">
+              <a:buNone/>
+            </a:pPr>
+            <a:r>
+              <a:rPr lang="en-US" sz="900" dirty="0">
+                <a:solidFill>
+                  <a:srgbClr val="888888"/>
+                </a:solidFill>
+                <a:latin typeface="Arial" pitchFamily="34" charset="0"/>
+                <a:ea typeface="Arial" pitchFamily="34" charset="-122"/>
+                <a:cs typeface="Arial" pitchFamily="34" charset="-120"/>
+              </a:rPr>
+              <a:t>CC6633</a:t>
             </a:r>
             <a:endParaRPr lang="en-US" sz="900" dirty="0"/>
           </a:p>
@@ -6671,7 +7054,7 @@
           <a:bodyPr wrap="square" rtlCol="0" anchor="ctr"/>
           <a:lstStyle/>
           <a:p>
-            <a:pPr marL="0" indent="0">
+            <a:pPr indent="0" marL="0">
               <a:buNone/>
             </a:pPr>
             <a:r>
@@ -6710,7 +7093,7 @@
           <a:bodyPr wrap="square" rtlCol="0" anchor="ctr"/>
           <a:lstStyle/>
           <a:p>
-            <a:pPr marL="0" indent="0">
+            <a:pPr indent="0" marL="0">
               <a:buNone/>
             </a:pPr>
             <a:r>
@@ -6749,7 +7132,7 @@
           <a:bodyPr wrap="square" rtlCol="0" anchor="ctr"/>
           <a:lstStyle/>
           <a:p>
-            <a:pPr marL="0" indent="0">
+            <a:pPr indent="0" marL="0">
               <a:buNone/>
             </a:pPr>
             <a:r>
@@ -6788,7 +7171,7 @@
           <a:bodyPr wrap="square" rtlCol="0" anchor="ctr"/>
           <a:lstStyle/>
           <a:p>
-            <a:pPr marL="0" indent="0" algn="r">
+            <a:pPr algn="r" indent="0" marL="0">
               <a:buNone/>
             </a:pPr>
             <a:r>
@@ -6872,11 +7255,11 @@
           <a:bodyPr wrap="square" rtlCol="0" anchor="ctr"/>
           <a:lstStyle/>
           <a:p>
-            <a:pPr marL="0" indent="0">
-              <a:buNone/>
-            </a:pPr>
-            <a:r>
-              <a:rPr lang="en-US" sz="1000" kern="0" spc="400" dirty="0">
+            <a:pPr indent="0" marL="0">
+              <a:buNone/>
+            </a:pPr>
+            <a:r>
+              <a:rPr lang="en-US" sz="1000" spc="400" kern="0" dirty="0">
                 <a:solidFill>
                   <a:srgbClr val="4CAF50"/>
                 </a:solidFill>
@@ -6911,7 +7294,7 @@
           <a:bodyPr wrap="square" rtlCol="0" anchor="ctr"/>
           <a:lstStyle/>
           <a:p>
-            <a:pPr marL="0" indent="0">
+            <a:pPr indent="0" marL="0">
               <a:buNone/>
             </a:pPr>
             <a:r>
@@ -6923,7 +7306,7 @@
                 <a:ea typeface="Arial" pitchFamily="34" charset="-122"/>
                 <a:cs typeface="Arial" pitchFamily="34" charset="-120"/>
               </a:rPr>
-              <a:t>14个子系统已全部完成设计</a:t>
+              <a:t>14个逻辑系统框架已覆盖，核心系统详细设计完成</a:t>
             </a:r>
             <a:endParaRPr lang="en-US" sz="2000" dirty="0"/>
           </a:p>
@@ -6975,7 +7358,7 @@
           <a:bodyPr wrap="square" rtlCol="0" anchor="ctr"/>
           <a:lstStyle/>
           <a:p>
-            <a:pPr marL="0" indent="0" algn="ctr">
+            <a:pPr algn="ctr" indent="0" marL="0">
               <a:buNone/>
             </a:pPr>
             <a:r>
@@ -7039,7 +7422,7 @@
           <a:bodyPr wrap="square" rtlCol="0" anchor="ctr"/>
           <a:lstStyle/>
           <a:p>
-            <a:pPr marL="0" indent="0" algn="ctr">
+            <a:pPr algn="ctr" indent="0" marL="0">
               <a:buNone/>
             </a:pPr>
             <a:r>
@@ -7103,7 +7486,7 @@
           <a:bodyPr wrap="square" rtlCol="0" anchor="ctr"/>
           <a:lstStyle/>
           <a:p>
-            <a:pPr marL="0" indent="0" algn="ctr">
+            <a:pPr algn="ctr" indent="0" marL="0">
               <a:buNone/>
             </a:pPr>
             <a:r>
@@ -7167,7 +7550,7 @@
           <a:bodyPr wrap="square" rtlCol="0" anchor="ctr"/>
           <a:lstStyle/>
           <a:p>
-            <a:pPr marL="0" indent="0" algn="ctr">
+            <a:pPr algn="ctr" indent="0" marL="0">
               <a:buNone/>
             </a:pPr>
             <a:r>
@@ -7231,7 +7614,7 @@
           <a:bodyPr wrap="square" rtlCol="0" anchor="ctr"/>
           <a:lstStyle/>
           <a:p>
-            <a:pPr marL="0" indent="0" algn="ctr">
+            <a:pPr algn="ctr" indent="0" marL="0">
               <a:buNone/>
             </a:pPr>
             <a:r>
@@ -7295,7 +7678,7 @@
           <a:bodyPr wrap="square" rtlCol="0" anchor="ctr"/>
           <a:lstStyle/>
           <a:p>
-            <a:pPr marL="0" indent="0" algn="ctr">
+            <a:pPr algn="ctr" indent="0" marL="0">
               <a:buNone/>
             </a:pPr>
             <a:r>
@@ -7359,7 +7742,7 @@
           <a:bodyPr wrap="square" rtlCol="0" anchor="ctr"/>
           <a:lstStyle/>
           <a:p>
-            <a:pPr marL="0" indent="0" algn="ctr">
+            <a:pPr algn="ctr" indent="0" marL="0">
               <a:buNone/>
             </a:pPr>
             <a:r>
@@ -7423,7 +7806,7 @@
           <a:bodyPr wrap="square" rtlCol="0" anchor="ctr"/>
           <a:lstStyle/>
           <a:p>
-            <a:pPr marL="0" indent="0" algn="ctr">
+            <a:pPr algn="ctr" indent="0" marL="0">
               <a:buNone/>
             </a:pPr>
             <a:r>
@@ -7487,7 +7870,7 @@
           <a:bodyPr wrap="square" rtlCol="0" anchor="ctr"/>
           <a:lstStyle/>
           <a:p>
-            <a:pPr marL="0" indent="0" algn="ctr">
+            <a:pPr algn="ctr" indent="0" marL="0">
               <a:buNone/>
             </a:pPr>
             <a:r>
@@ -7551,7 +7934,7 @@
           <a:bodyPr wrap="square" rtlCol="0" anchor="ctr"/>
           <a:lstStyle/>
           <a:p>
-            <a:pPr marL="0" indent="0" algn="ctr">
+            <a:pPr algn="ctr" indent="0" marL="0">
               <a:buNone/>
             </a:pPr>
             <a:r>
@@ -7615,7 +7998,7 @@
           <a:bodyPr wrap="square" rtlCol="0" anchor="ctr"/>
           <a:lstStyle/>
           <a:p>
-            <a:pPr marL="0" indent="0" algn="ctr">
+            <a:pPr algn="ctr" indent="0" marL="0">
               <a:buNone/>
             </a:pPr>
             <a:r>
@@ -7679,7 +8062,7 @@
           <a:bodyPr wrap="square" rtlCol="0" anchor="ctr"/>
           <a:lstStyle/>
           <a:p>
-            <a:pPr marL="0" indent="0" algn="ctr">
+            <a:pPr algn="ctr" indent="0" marL="0">
               <a:buNone/>
             </a:pPr>
             <a:r>
@@ -7743,7 +8126,7 @@
           <a:bodyPr wrap="square" rtlCol="0" anchor="ctr"/>
           <a:lstStyle/>
           <a:p>
-            <a:pPr marL="0" indent="0" algn="ctr">
+            <a:pPr algn="ctr" indent="0" marL="0">
               <a:buNone/>
             </a:pPr>
             <a:r>
@@ -7807,7 +8190,7 @@
           <a:bodyPr wrap="square" rtlCol="0" anchor="ctr"/>
           <a:lstStyle/>
           <a:p>
-            <a:pPr marL="0" indent="0" algn="ctr">
+            <a:pPr algn="ctr" indent="0" marL="0">
               <a:buNone/>
             </a:pPr>
             <a:r>
@@ -7846,7 +8229,7 @@
           <a:bodyPr wrap="square" rtlCol="0" anchor="ctr"/>
           <a:lstStyle/>
           <a:p>
-            <a:pPr marL="0" indent="0" algn="r">
+            <a:pPr algn="r" indent="0" marL="0">
               <a:buNone/>
             </a:pPr>
             <a:r>
@@ -7930,11 +8313,11 @@
           <a:bodyPr wrap="square" rtlCol="0" anchor="ctr"/>
           <a:lstStyle/>
           <a:p>
-            <a:pPr marL="0" indent="0">
-              <a:buNone/>
-            </a:pPr>
-            <a:r>
-              <a:rPr lang="en-US" sz="1000" kern="0" spc="400" dirty="0">
+            <a:pPr indent="0" marL="0">
+              <a:buNone/>
+            </a:pPr>
+            <a:r>
+              <a:rPr lang="en-US" sz="1000" spc="400" kern="0" dirty="0">
                 <a:solidFill>
                   <a:srgbClr val="4CAF50"/>
                 </a:solidFill>
@@ -7969,7 +8352,7 @@
           <a:bodyPr wrap="square" rtlCol="0" anchor="ctr"/>
           <a:lstStyle/>
           <a:p>
-            <a:pPr marL="0" indent="0">
+            <a:pPr indent="0" marL="0">
               <a:buNone/>
             </a:pPr>
             <a:r>
@@ -8008,7 +8391,7 @@
           <a:bodyPr wrap="square" rtlCol="0" anchor="ctr"/>
           <a:lstStyle/>
           <a:p>
-            <a:pPr marL="0" indent="0">
+            <a:pPr indent="0" marL="0">
               <a:buNone/>
             </a:pPr>
             <a:r>
@@ -8020,7 +8403,7 @@
                 <a:ea typeface="Arial" pitchFamily="34" charset="-122"/>
                 <a:cs typeface="Arial" pitchFamily="34" charset="-120"/>
               </a:rPr>
-              <a:t>小说（74章·50万字）</a:t>
+              <a:t>小说（74章·正文约23万字）</a:t>
             </a:r>
             <a:endParaRPr lang="en-US" sz="1200" dirty="0"/>
           </a:p>
@@ -8047,7 +8430,7 @@
           <a:bodyPr wrap="square" rtlCol="0" anchor="ctr"/>
           <a:lstStyle/>
           <a:p>
-            <a:pPr marL="0" indent="0" algn="r">
+            <a:pPr algn="r" indent="0" marL="0">
               <a:buNone/>
             </a:pPr>
             <a:r>
@@ -8109,7 +8492,7 @@
           <a:bodyPr wrap="square" rtlCol="0" anchor="ctr"/>
           <a:lstStyle/>
           <a:p>
-            <a:pPr marL="0" indent="0">
+            <a:pPr indent="0" marL="0">
               <a:buNone/>
             </a:pPr>
             <a:r>
@@ -8148,7 +8531,7 @@
           <a:bodyPr wrap="square" rtlCol="0" anchor="ctr"/>
           <a:lstStyle/>
           <a:p>
-            <a:pPr marL="0" indent="0" algn="r">
+            <a:pPr algn="r" indent="0" marL="0">
               <a:buNone/>
             </a:pPr>
             <a:r>
@@ -8210,7 +8593,7 @@
           <a:bodyPr wrap="square" rtlCol="0" anchor="ctr"/>
           <a:lstStyle/>
           <a:p>
-            <a:pPr marL="0" indent="0">
+            <a:pPr indent="0" marL="0">
               <a:buNone/>
             </a:pPr>
             <a:r>
@@ -8222,7 +8605,7 @@
                 <a:ea typeface="Arial" pitchFamily="34" charset="-122"/>
                 <a:cs typeface="Arial" pitchFamily="34" charset="-120"/>
               </a:rPr>
-              <a:t>游戏系统设计（14子系统）</a:t>
+              <a:t>游戏系统设计（14个逻辑系统）</a:t>
             </a:r>
             <a:endParaRPr lang="en-US" sz="1200" dirty="0"/>
           </a:p>
@@ -8249,19 +8632,19 @@
           <a:bodyPr wrap="square" rtlCol="0" anchor="ctr"/>
           <a:lstStyle/>
           <a:p>
-            <a:pPr marL="0" indent="0" algn="r">
+            <a:pPr algn="r" indent="0" marL="0">
               <a:buNone/>
             </a:pPr>
             <a:r>
               <a:rPr lang="en-US" sz="1200" b="1" dirty="0">
                 <a:solidFill>
-                  <a:srgbClr val="4CAF50"/>
+                  <a:srgbClr val="D4A040"/>
                 </a:solidFill>
                 <a:latin typeface="Courier New" pitchFamily="34" charset="0"/>
                 <a:ea typeface="Courier New" pitchFamily="34" charset="-122"/>
                 <a:cs typeface="Courier New" pitchFamily="34" charset="-120"/>
               </a:rPr>
-              <a:t>100%</a:t>
+              <a:t>核心已完成/PVP运营远期</a:t>
             </a:r>
             <a:endParaRPr lang="en-US" sz="1200" dirty="0"/>
           </a:p>
@@ -8311,7 +8694,7 @@
           <a:bodyPr wrap="square" rtlCol="0" anchor="ctr"/>
           <a:lstStyle/>
           <a:p>
-            <a:pPr marL="0" indent="0">
+            <a:pPr indent="0" marL="0">
               <a:buNone/>
             </a:pPr>
             <a:r>
@@ -8350,7 +8733,7 @@
           <a:bodyPr wrap="square" rtlCol="0" anchor="ctr"/>
           <a:lstStyle/>
           <a:p>
-            <a:pPr marL="0" indent="0" algn="r">
+            <a:pPr algn="r" indent="0" marL="0">
               <a:buNone/>
             </a:pPr>
             <a:r>
@@ -8412,7 +8795,7 @@
           <a:bodyPr wrap="square" rtlCol="0" anchor="ctr"/>
           <a:lstStyle/>
           <a:p>
-            <a:pPr marL="0" indent="0">
+            <a:pPr indent="0" marL="0">
               <a:buNone/>
             </a:pPr>
             <a:r>
@@ -8451,7 +8834,7 @@
           <a:bodyPr wrap="square" rtlCol="0" anchor="ctr"/>
           <a:lstStyle/>
           <a:p>
-            <a:pPr marL="0" indent="0" algn="r">
+            <a:pPr algn="r" indent="0" marL="0">
               <a:buNone/>
             </a:pPr>
             <a:r>
@@ -8513,7 +8896,7 @@
           <a:bodyPr wrap="square" rtlCol="0" anchor="ctr"/>
           <a:lstStyle/>
           <a:p>
-            <a:pPr marL="0" indent="0">
+            <a:pPr indent="0" marL="0">
               <a:buNone/>
             </a:pPr>
             <a:r>
@@ -8552,7 +8935,7 @@
           <a:bodyPr wrap="square" rtlCol="0" anchor="ctr"/>
           <a:lstStyle/>
           <a:p>
-            <a:pPr marL="0" indent="0" algn="r">
+            <a:pPr algn="r" indent="0" marL="0">
               <a:buNone/>
             </a:pPr>
             <a:r>
@@ -8614,7 +8997,7 @@
           <a:bodyPr wrap="square" rtlCol="0" anchor="ctr"/>
           <a:lstStyle/>
           <a:p>
-            <a:pPr marL="0" indent="0">
+            <a:pPr indent="0" marL="0">
               <a:buNone/>
             </a:pPr>
             <a:r>
@@ -8653,7 +9036,7 @@
           <a:bodyPr wrap="square" rtlCol="0" anchor="ctr"/>
           <a:lstStyle/>
           <a:p>
-            <a:pPr marL="0" indent="0" algn="r">
+            <a:pPr algn="r" indent="0" marL="0">
               <a:buNone/>
             </a:pPr>
             <a:r>
@@ -8692,7 +9075,7 @@
           <a:bodyPr wrap="square" rtlCol="0" anchor="ctr"/>
           <a:lstStyle/>
           <a:p>
-            <a:pPr marL="0" indent="0" algn="r">
+            <a:pPr algn="r" indent="0" marL="0">
               <a:buNone/>
             </a:pPr>
             <a:r>
@@ -8776,11 +9159,11 @@
           <a:bodyPr wrap="square" rtlCol="0" anchor="ctr"/>
           <a:lstStyle/>
           <a:p>
-            <a:pPr marL="0" indent="0">
-              <a:buNone/>
-            </a:pPr>
-            <a:r>
-              <a:rPr lang="en-US" sz="1000" kern="0" spc="400" dirty="0">
+            <a:pPr indent="0" marL="0">
+              <a:buNone/>
+            </a:pPr>
+            <a:r>
+              <a:rPr lang="en-US" sz="1000" spc="400" kern="0" dirty="0">
                 <a:solidFill>
                   <a:srgbClr val="4CAF50"/>
                 </a:solidFill>
@@ -8815,7 +9198,7 @@
           <a:bodyPr wrap="square" rtlCol="0" anchor="ctr"/>
           <a:lstStyle/>
           <a:p>
-            <a:pPr marL="0" indent="0">
+            <a:pPr indent="0" marL="0">
               <a:buNone/>
             </a:pPr>
             <a:r>
@@ -8854,7 +9237,7 @@
           <a:bodyPr wrap="square" rtlCol="0" anchor="ctr"/>
           <a:lstStyle/>
           <a:p>
-            <a:pPr marL="0" indent="0" algn="ctr">
+            <a:pPr algn="ctr" indent="0" marL="0">
               <a:buNone/>
             </a:pPr>
             <a:endParaRPr lang="en-US" sz="1000" dirty="0"/>
@@ -8882,7 +9265,7 @@
           <a:bodyPr wrap="square" rtlCol="0" anchor="ctr"/>
           <a:lstStyle/>
           <a:p>
-            <a:pPr marL="0" indent="0" algn="ctr">
+            <a:pPr algn="ctr" indent="0" marL="0">
               <a:buNone/>
             </a:pPr>
             <a:r>
@@ -8921,7 +9304,7 @@
           <a:bodyPr wrap="square" rtlCol="0" anchor="ctr"/>
           <a:lstStyle/>
           <a:p>
-            <a:pPr marL="0" indent="0" algn="ctr">
+            <a:pPr algn="ctr" indent="0" marL="0">
               <a:buNone/>
             </a:pPr>
             <a:r>
@@ -8960,7 +9343,7 @@
           <a:bodyPr wrap="square" rtlCol="0" anchor="ctr"/>
           <a:lstStyle/>
           <a:p>
-            <a:pPr marL="0" indent="0" algn="ctr">
+            <a:pPr algn="ctr" indent="0" marL="0">
               <a:buNone/>
             </a:pPr>
             <a:r>
@@ -8999,7 +9382,7 @@
           <a:bodyPr wrap="square" rtlCol="0" anchor="ctr"/>
           <a:lstStyle/>
           <a:p>
-            <a:pPr marL="0" indent="0" algn="ctr">
+            <a:pPr algn="ctr" indent="0" marL="0">
               <a:buNone/>
             </a:pPr>
             <a:r>
@@ -9038,7 +9421,7 @@
           <a:bodyPr wrap="square" rtlCol="0" anchor="ctr"/>
           <a:lstStyle/>
           <a:p>
-            <a:pPr marL="0" indent="0" algn="ctr">
+            <a:pPr algn="ctr" indent="0" marL="0">
               <a:buNone/>
             </a:pPr>
             <a:r>
@@ -9077,7 +9460,7 @@
           <a:bodyPr wrap="square" rtlCol="0" anchor="ctr"/>
           <a:lstStyle/>
           <a:p>
-            <a:pPr marL="0" indent="0" algn="ctr">
+            <a:pPr algn="ctr" indent="0" marL="0">
               <a:buNone/>
             </a:pPr>
             <a:r>
@@ -9116,7 +9499,7 @@
           <a:bodyPr wrap="square" rtlCol="0" anchor="ctr"/>
           <a:lstStyle/>
           <a:p>
-            <a:pPr marL="0" indent="0" algn="ctr">
+            <a:pPr algn="ctr" indent="0" marL="0">
               <a:buNone/>
             </a:pPr>
             <a:r>
@@ -9155,7 +9538,7 @@
           <a:bodyPr wrap="square" rtlCol="0" anchor="ctr"/>
           <a:lstStyle/>
           <a:p>
-            <a:pPr marL="0" indent="0" algn="ctr">
+            <a:pPr algn="ctr" indent="0" marL="0">
               <a:buNone/>
             </a:pPr>
             <a:r>
@@ -9194,7 +9577,7 @@
           <a:bodyPr wrap="square" rtlCol="0" anchor="ctr"/>
           <a:lstStyle/>
           <a:p>
-            <a:pPr marL="0" indent="0" algn="ctr">
+            <a:pPr algn="ctr" indent="0" marL="0">
               <a:buNone/>
             </a:pPr>
             <a:r>
@@ -9233,7 +9616,7 @@
           <a:bodyPr wrap="square" rtlCol="0" anchor="ctr"/>
           <a:lstStyle/>
           <a:p>
-            <a:pPr marL="0" indent="0" algn="ctr">
+            <a:pPr algn="ctr" indent="0" marL="0">
               <a:buNone/>
             </a:pPr>
             <a:r>
@@ -9272,7 +9655,7 @@
           <a:bodyPr wrap="square" rtlCol="0" anchor="ctr"/>
           <a:lstStyle/>
           <a:p>
-            <a:pPr marL="0" indent="0" algn="ctr">
+            <a:pPr algn="ctr" indent="0" marL="0">
               <a:buNone/>
             </a:pPr>
             <a:r>
@@ -9311,7 +9694,7 @@
           <a:bodyPr wrap="square" rtlCol="0" anchor="ctr"/>
           <a:lstStyle/>
           <a:p>
-            <a:pPr marL="0" indent="0" algn="ctr">
+            <a:pPr algn="ctr" indent="0" marL="0">
               <a:buNone/>
             </a:pPr>
             <a:r>
@@ -9350,7 +9733,7 @@
           <a:bodyPr wrap="square" rtlCol="0" anchor="ctr"/>
           <a:lstStyle/>
           <a:p>
-            <a:pPr marL="0" indent="0" algn="ctr">
+            <a:pPr algn="ctr" indent="0" marL="0">
               <a:buNone/>
             </a:pPr>
             <a:r>
@@ -9389,7 +9772,7 @@
           <a:bodyPr wrap="square" rtlCol="0" anchor="ctr"/>
           <a:lstStyle/>
           <a:p>
-            <a:pPr marL="0" indent="0" algn="ctr">
+            <a:pPr algn="ctr" indent="0" marL="0">
               <a:buNone/>
             </a:pPr>
             <a:r>
@@ -9428,7 +9811,7 @@
           <a:bodyPr wrap="square" rtlCol="0" anchor="ctr"/>
           <a:lstStyle/>
           <a:p>
-            <a:pPr marL="0" indent="0" algn="ctr">
+            <a:pPr algn="ctr" indent="0" marL="0">
               <a:buNone/>
             </a:pPr>
             <a:r>
@@ -9467,7 +9850,7 @@
           <a:bodyPr wrap="square" rtlCol="0" anchor="ctr"/>
           <a:lstStyle/>
           <a:p>
-            <a:pPr marL="0" indent="0" algn="ctr">
+            <a:pPr algn="ctr" indent="0" marL="0">
               <a:buNone/>
             </a:pPr>
             <a:r>
@@ -9506,7 +9889,7 @@
           <a:bodyPr wrap="square" rtlCol="0" anchor="ctr"/>
           <a:lstStyle/>
           <a:p>
-            <a:pPr marL="0" indent="0" algn="ctr">
+            <a:pPr algn="ctr" indent="0" marL="0">
               <a:buNone/>
             </a:pPr>
             <a:r>
@@ -9545,7 +9928,7 @@
           <a:bodyPr wrap="square" rtlCol="0" anchor="ctr"/>
           <a:lstStyle/>
           <a:p>
-            <a:pPr marL="0" indent="0" algn="ctr">
+            <a:pPr algn="ctr" indent="0" marL="0">
               <a:buNone/>
             </a:pPr>
             <a:r>
@@ -9584,7 +9967,7 @@
           <a:bodyPr wrap="square" rtlCol="0" anchor="ctr"/>
           <a:lstStyle/>
           <a:p>
-            <a:pPr marL="0" indent="0" algn="ctr">
+            <a:pPr algn="ctr" indent="0" marL="0">
               <a:buNone/>
             </a:pPr>
             <a:r>
@@ -9623,7 +10006,7 @@
           <a:bodyPr wrap="square" rtlCol="0" anchor="ctr"/>
           <a:lstStyle/>
           <a:p>
-            <a:pPr marL="0" indent="0" algn="ctr">
+            <a:pPr algn="ctr" indent="0" marL="0">
               <a:buNone/>
             </a:pPr>
             <a:r>
@@ -9662,7 +10045,7 @@
           <a:bodyPr wrap="square" rtlCol="0" anchor="ctr"/>
           <a:lstStyle/>
           <a:p>
-            <a:pPr marL="0" indent="0" algn="r">
+            <a:pPr algn="r" indent="0" marL="0">
               <a:buNone/>
             </a:pPr>
             <a:r>
@@ -9981,319 +10364,4 @@
     </a:ext>
   </a:extLst>
 </a:theme>
-</file>
-
-<file path=ppt/theme/theme2.xml><?xml version="1.0" encoding="utf-8"?>
-<a:theme xmlns:a="http://schemas.openxmlformats.org/drawingml/2006/main" name="Office 主题​​">
-  <a:themeElements>
-    <a:clrScheme name="Office">
-      <a:dk1>
-        <a:sysClr val="windowText" lastClr="000000"/>
-      </a:dk1>
-      <a:lt1>
-        <a:sysClr val="window" lastClr="FFFFFF"/>
-      </a:lt1>
-      <a:dk2>
-        <a:srgbClr val="0E2841"/>
-      </a:dk2>
-      <a:lt2>
-        <a:srgbClr val="E8E8E8"/>
-      </a:lt2>
-      <a:accent1>
-        <a:srgbClr val="156082"/>
-      </a:accent1>
-      <a:accent2>
-        <a:srgbClr val="E97132"/>
-      </a:accent2>
-      <a:accent3>
-        <a:srgbClr val="196B24"/>
-      </a:accent3>
-      <a:accent4>
-        <a:srgbClr val="0F9ED5"/>
-      </a:accent4>
-      <a:accent5>
-        <a:srgbClr val="A02B93"/>
-      </a:accent5>
-      <a:accent6>
-        <a:srgbClr val="4EA72E"/>
-      </a:accent6>
-      <a:hlink>
-        <a:srgbClr val="467886"/>
-      </a:hlink>
-      <a:folHlink>
-        <a:srgbClr val="96607D"/>
-      </a:folHlink>
-    </a:clrScheme>
-    <a:fontScheme name="Office">
-      <a:majorFont>
-        <a:latin typeface="等线 Light" panose="02110004020202020204"/>
-        <a:ea typeface=""/>
-        <a:cs typeface=""/>
-        <a:font script="Jpan" typeface="游ゴシック Light"/>
-        <a:font script="Hang" typeface="맑은 고딕"/>
-        <a:font script="Hans" typeface="等线 Light"/>
-        <a:font script="Hant" typeface="新細明體"/>
-        <a:font script="Arab" typeface="Times New Roman"/>
-        <a:font script="Hebr" typeface="Times New Roman"/>
-        <a:font script="Thai" typeface="Angsana New"/>
-        <a:font script="Ethi" typeface="Nyala"/>
-        <a:font script="Beng" typeface="Vrinda"/>
-        <a:font script="Gujr" typeface="Shruti"/>
-        <a:font script="Khmr" typeface="MoolBoran"/>
-        <a:font script="Knda" typeface="Tunga"/>
-        <a:font script="Guru" typeface="Raavi"/>
-        <a:font script="Cans" typeface="Euphemia"/>
-        <a:font script="Cher" typeface="Plantagenet Cherokee"/>
-        <a:font script="Yiii" typeface="Microsoft Yi Baiti"/>
-        <a:font script="Tibt" typeface="Microsoft Himalaya"/>
-        <a:font script="Thaa" typeface="MV Boli"/>
-        <a:font script="Deva" typeface="Mangal"/>
-        <a:font script="Telu" typeface="Gautami"/>
-        <a:font script="Taml" typeface="Latha"/>
-        <a:font script="Syrc" typeface="Estrangelo Edessa"/>
-        <a:font script="Orya" typeface="Kalinga"/>
-        <a:font script="Mlym" typeface="Kartika"/>
-        <a:font script="Laoo" typeface="DokChampa"/>
-        <a:font script="Sinh" typeface="Iskoola Pota"/>
-        <a:font script="Mong" typeface="Mongolian Baiti"/>
-        <a:font script="Viet" typeface="Times New Roman"/>
-        <a:font script="Uigh" typeface="Microsoft Uighur"/>
-        <a:font script="Geor" typeface="Sylfaen"/>
-        <a:font script="Armn" typeface="Arial"/>
-        <a:font script="Bugi" typeface="Leelawadee UI"/>
-        <a:font script="Bopo" typeface="Microsoft JhengHei"/>
-        <a:font script="Java" typeface="Javanese Text"/>
-        <a:font script="Lisu" typeface="Segoe UI"/>
-        <a:font script="Mymr" typeface="Myanmar Text"/>
-        <a:font script="Nkoo" typeface="Ebrima"/>
-        <a:font script="Olck" typeface="Nirmala UI"/>
-        <a:font script="Osma" typeface="Ebrima"/>
-        <a:font script="Phag" typeface="Phagspa"/>
-        <a:font script="Syrn" typeface="Estrangelo Edessa"/>
-        <a:font script="Syrj" typeface="Estrangelo Edessa"/>
-        <a:font script="Syre" typeface="Estrangelo Edessa"/>
-        <a:font script="Sora" typeface="Nirmala UI"/>
-        <a:font script="Tale" typeface="Microsoft Tai Le"/>
-        <a:font script="Talu" typeface="Microsoft New Tai Lue"/>
-        <a:font script="Tfng" typeface="Ebrima"/>
-      </a:majorFont>
-      <a:minorFont>
-        <a:latin typeface="等线" panose="02110004020202020204"/>
-        <a:ea typeface=""/>
-        <a:cs typeface=""/>
-        <a:font script="Jpan" typeface="游ゴシック"/>
-        <a:font script="Hang" typeface="맑은 고딕"/>
-        <a:font script="Hans" typeface="等线"/>
-        <a:font script="Hant" typeface="新細明體"/>
-        <a:font script="Arab" typeface="Arial"/>
-        <a:font script="Hebr" typeface="Arial"/>
-        <a:font script="Thai" typeface="Cordia New"/>
-        <a:font script="Ethi" typeface="Nyala"/>
-        <a:font script="Beng" typeface="Vrinda"/>
-        <a:font script="Gujr" typeface="Shruti"/>
-        <a:font script="Khmr" typeface="DaunPenh"/>
-        <a:font script="Knda" typeface="Tunga"/>
-        <a:font script="Guru" typeface="Raavi"/>
-        <a:font script="Cans" typeface="Euphemia"/>
-        <a:font script="Cher" typeface="Plantagenet Cherokee"/>
-        <a:font script="Yiii" typeface="Microsoft Yi Baiti"/>
-        <a:font script="Tibt" typeface="Microsoft Himalaya"/>
-        <a:font script="Thaa" typeface="MV Boli"/>
-        <a:font script="Deva" typeface="Mangal"/>
-        <a:font script="Telu" typeface="Gautami"/>
-        <a:font script="Taml" typeface="Latha"/>
-        <a:font script="Syrc" typeface="Estrangelo Edessa"/>
-        <a:font script="Orya" typeface="Kalinga"/>
-        <a:font script="Mlym" typeface="Kartika"/>
-        <a:font script="Laoo" typeface="DokChampa"/>
-        <a:font script="Sinh" typeface="Iskoola Pota"/>
-        <a:font script="Mong" typeface="Mongolian Baiti"/>
-        <a:font script="Viet" typeface="Arial"/>
-        <a:font script="Uigh" typeface="Microsoft Uighur"/>
-        <a:font script="Geor" typeface="Sylfaen"/>
-        <a:font script="Armn" typeface="Arial"/>
-        <a:font script="Bugi" typeface="Leelawadee UI"/>
-        <a:font script="Bopo" typeface="Microsoft JhengHei"/>
-        <a:font script="Java" typeface="Javanese Text"/>
-        <a:font script="Lisu" typeface="Segoe UI"/>
-        <a:font script="Mymr" typeface="Myanmar Text"/>
-        <a:font script="Nkoo" typeface="Ebrima"/>
-        <a:font script="Olck" typeface="Nirmala UI"/>
-        <a:font script="Osma" typeface="Ebrima"/>
-        <a:font script="Phag" typeface="Phagspa"/>
-        <a:font script="Syrn" typeface="Estrangelo Edessa"/>
-        <a:font script="Syrj" typeface="Estrangelo Edessa"/>
-        <a:font script="Syre" typeface="Estrangelo Edessa"/>
-        <a:font script="Sora" typeface="Nirmala UI"/>
-        <a:font script="Tale" typeface="Microsoft Tai Le"/>
-        <a:font script="Talu" typeface="Microsoft New Tai Lue"/>
-        <a:font script="Tfng" typeface="Ebrima"/>
-      </a:minorFont>
-    </a:fontScheme>
-    <a:fmtScheme name="Office">
-      <a:fillStyleLst>
-        <a:solidFill>
-          <a:schemeClr val="phClr"/>
-        </a:solidFill>
-        <a:gradFill rotWithShape="1">
-          <a:gsLst>
-            <a:gs pos="0">
-              <a:schemeClr val="phClr">
-                <a:lumMod val="110000"/>
-                <a:satMod val="105000"/>
-                <a:tint val="67000"/>
-              </a:schemeClr>
-            </a:gs>
-            <a:gs pos="50000">
-              <a:schemeClr val="phClr">
-                <a:lumMod val="105000"/>
-                <a:satMod val="103000"/>
-                <a:tint val="73000"/>
-              </a:schemeClr>
-            </a:gs>
-            <a:gs pos="100000">
-              <a:schemeClr val="phClr">
-                <a:lumMod val="105000"/>
-                <a:satMod val="109000"/>
-                <a:tint val="81000"/>
-              </a:schemeClr>
-            </a:gs>
-          </a:gsLst>
-          <a:lin ang="5400000" scaled="0"/>
-        </a:gradFill>
-        <a:gradFill rotWithShape="1">
-          <a:gsLst>
-            <a:gs pos="0">
-              <a:schemeClr val="phClr">
-                <a:satMod val="103000"/>
-                <a:lumMod val="102000"/>
-                <a:tint val="94000"/>
-              </a:schemeClr>
-            </a:gs>
-            <a:gs pos="50000">
-              <a:schemeClr val="phClr">
-                <a:satMod val="110000"/>
-                <a:lumMod val="100000"/>
-                <a:shade val="100000"/>
-              </a:schemeClr>
-            </a:gs>
-            <a:gs pos="100000">
-              <a:schemeClr val="phClr">
-                <a:lumMod val="99000"/>
-                <a:satMod val="120000"/>
-                <a:shade val="78000"/>
-              </a:schemeClr>
-            </a:gs>
-          </a:gsLst>
-          <a:lin ang="5400000" scaled="0"/>
-        </a:gradFill>
-      </a:fillStyleLst>
-      <a:lnStyleLst>
-        <a:ln w="12700" cap="flat" cmpd="sng" algn="ctr">
-          <a:solidFill>
-            <a:schemeClr val="phClr"/>
-          </a:solidFill>
-          <a:prstDash val="solid"/>
-          <a:miter lim="800000"/>
-        </a:ln>
-        <a:ln w="19050" cap="flat" cmpd="sng" algn="ctr">
-          <a:solidFill>
-            <a:schemeClr val="phClr"/>
-          </a:solidFill>
-          <a:prstDash val="solid"/>
-          <a:miter lim="800000"/>
-        </a:ln>
-        <a:ln w="25400" cap="flat" cmpd="sng" algn="ctr">
-          <a:solidFill>
-            <a:schemeClr val="phClr"/>
-          </a:solidFill>
-          <a:prstDash val="solid"/>
-          <a:miter lim="800000"/>
-        </a:ln>
-      </a:lnStyleLst>
-      <a:effectStyleLst>
-        <a:effectStyle>
-          <a:effectLst/>
-        </a:effectStyle>
-        <a:effectStyle>
-          <a:effectLst/>
-        </a:effectStyle>
-        <a:effectStyle>
-          <a:effectLst>
-            <a:outerShdw blurRad="57150" dist="19050" dir="5400000" algn="ctr" rotWithShape="0">
-              <a:srgbClr val="000000">
-                <a:alpha val="63000"/>
-              </a:srgbClr>
-            </a:outerShdw>
-          </a:effectLst>
-        </a:effectStyle>
-      </a:effectStyleLst>
-      <a:bgFillStyleLst>
-        <a:solidFill>
-          <a:schemeClr val="phClr"/>
-        </a:solidFill>
-        <a:solidFill>
-          <a:schemeClr val="phClr">
-            <a:tint val="95000"/>
-            <a:satMod val="170000"/>
-          </a:schemeClr>
-        </a:solidFill>
-        <a:gradFill rotWithShape="1">
-          <a:gsLst>
-            <a:gs pos="0">
-              <a:schemeClr val="phClr">
-                <a:tint val="93000"/>
-                <a:satMod val="150000"/>
-                <a:shade val="98000"/>
-                <a:lumMod val="102000"/>
-              </a:schemeClr>
-            </a:gs>
-            <a:gs pos="50000">
-              <a:schemeClr val="phClr">
-                <a:tint val="98000"/>
-                <a:satMod val="130000"/>
-                <a:shade val="90000"/>
-                <a:lumMod val="103000"/>
-              </a:schemeClr>
-            </a:gs>
-            <a:gs pos="100000">
-              <a:schemeClr val="phClr">
-                <a:shade val="63000"/>
-                <a:satMod val="120000"/>
-              </a:schemeClr>
-            </a:gs>
-          </a:gsLst>
-          <a:lin ang="5400000" scaled="0"/>
-        </a:gradFill>
-      </a:bgFillStyleLst>
-    </a:fmtScheme>
-  </a:themeElements>
-  <a:objectDefaults>
-    <a:lnDef>
-      <a:spPr/>
-      <a:bodyPr/>
-      <a:lstStyle/>
-      <a:style>
-        <a:lnRef idx="2">
-          <a:schemeClr val="accent1"/>
-        </a:lnRef>
-        <a:fillRef idx="0">
-          <a:schemeClr val="accent1"/>
-        </a:fillRef>
-        <a:effectRef idx="1">
-          <a:schemeClr val="accent1"/>
-        </a:effectRef>
-        <a:fontRef idx="minor">
-          <a:schemeClr val="tx1"/>
-        </a:fontRef>
-      </a:style>
-    </a:lnDef>
-  </a:objectDefaults>
-  <a:extraClrSchemeLst/>
-  <a:extLst>
-    <a:ext uri="{05A4C25C-085E-4340-85A3-A5531E510DB2}">
-      <thm15:themeFamily xmlns:thm15="http://schemas.microsoft.com/office/thememl/2012/main" name="Office Theme" id="{2E142A2C-CD16-42D6-873A-C26D2A0506FA}" vid="{1BDDFF52-6CD6-40A5-AB3C-68EB2F1E4D0A}"/>
-    </a:ext>
-  </a:extLst>
-</a:theme>
 </file>